--- a/examples/pm5_chapter_cover_insertion/chapter_cover_insertion_guide.pptx
+++ b/examples/pm5_chapter_cover_insertion/chapter_cover_insertion_guide.pptx
@@ -590,9 +590,7 @@
               <a:t>NOTE_CONTENT_FORMAT: 1.0</a:t>
             </a:r>
           </a:p>
-          <a:p>
-            <a:endParaRPr/>
-          </a:p>
+          <a:p/>
           <a:p>
             <a:r>
               <a:t>===BLOCK===</a:t>
@@ -603,9 +601,7 @@
               <a:t>{{BLOCK:IMAGE}}</a:t>
             </a:r>
           </a:p>
-          <a:p>
-            <a:endParaRPr/>
-          </a:p>
+          <a:p/>
           <a:p>
             <a:r>
               <a:t>export-image-mode: slide_with_rectpct</a:t>
@@ -621,45 +617,34 @@
               <a:t>export-image: extracted/figures/&lt;__BASEFILENAME__&gt;_slide&lt;__SLIDENUM__&gt;_fig.png</a:t>
             </a:r>
           </a:p>
-          <a:p>
-            <a:endParaRPr/>
-          </a:p>
-          <a:p>
-            <a:r>
-              <a:rPr lang="en-US" altLang="ja-JP"/>
+          <a:p/>
+          <a:p>
+            <a:r>
               <a:t>===BLOCK===</a:t>
             </a:r>
           </a:p>
           <a:p>
             <a:r>
-              <a:rPr lang="en-US" altLang="ja-JP"/>
               <a:t>{{BLOCK:IMAGE}}</a:t>
             </a:r>
           </a:p>
-          <a:p>
-            <a:endParaRPr lang="en-US" altLang="ja-JP"/>
-          </a:p>
-          <a:p>
-            <a:r>
-              <a:rPr lang="en-US" altLang="ja-JP"/>
+          <a:p/>
+          <a:p>
+            <a:r>
               <a:t>export-image-mode: slide_with_rectpct</a:t>
             </a:r>
           </a:p>
           <a:p>
             <a:r>
-              <a:rPr lang="en-US" altLang="ja-JP"/>
               <a:t>export-image-target: keyvisual</a:t>
             </a:r>
           </a:p>
           <a:p>
             <a:r>
-              <a:rPr lang="en-US" altLang="ja-JP"/>
               <a:t>export-image: extracted/figures/&lt;__BASEFILENAME__&gt;_keyvisual.png</a:t>
             </a:r>
           </a:p>
-          <a:p>
-            <a:endParaRPr lang="en-US"/>
-          </a:p>
+          <a:p/>
           <a:p>
             <a:r>
               <a:t>===BLOCK===</a:t>
@@ -670,9 +655,7 @@
               <a:t>{{BLOCK:MD:LONG}}</a:t>
             </a:r>
           </a:p>
-          <a:p>
-            <a:endParaRPr/>
-          </a:p>
+          <a:p/>
           <a:p>
             <a:r>
               <a:t>export-note: extracted/&lt;__BASEFILENAME__&gt;_slide&lt;__SLIDENUM__&gt;_md.md</a:t>
@@ -688,99 +671,62 @@
               <a:t>## &lt;__TITLE__&gt;</a:t>
             </a:r>
           </a:p>
-          <a:p>
-            <a:endParaRPr/>
-          </a:p>
+          <a:p/>
           <a:p>
             <a:r>
               <a:t>章・節、つまり Chapter/Section 構造の書籍にはしばしば 「章とびら（Chapter Cover）」 をつけます。これは章全体の説明や、各節の概要、章単位での目次などを含むスライドであり、いわば  **「前置き」** です。</a:t>
             </a:r>
           </a:p>
-          <a:p>
-            <a:endParaRPr/>
-          </a:p>
+          <a:p/>
           <a:p>
             <a:r>
               <a:t>それに対して、本題は **「節」** の部分に記述します。通常、この部分を文書部品マスターとして個別の pptx ファイルとして管理します。つまり、個別の文書部品マスターpptxには「本題」 部分しか入っていないことがあります。</a:t>
             </a:r>
           </a:p>
-          <a:p>
-            <a:endParaRPr/>
-          </a:p>
+          <a:p/>
           <a:p>
             <a:r>
               <a:t>そこで、Chapter Cover が必要なら別途挿入します。</a:t>
             </a:r>
           </a:p>
-          <a:p>
-            <a:endParaRPr/>
-          </a:p>
-          <a:p>
-            <a:r>
-              <a:t>```{=latex}</a:t>
-            </a:r>
-          </a:p>
-          <a:p>
-            <a:r>
-              <a:t>\par\vspace{1\baselineskip}</a:t>
-            </a:r>
-          </a:p>
-          <a:p>
-            <a:r>
-              <a:t>\begin{center}</a:t>
-            </a:r>
-          </a:p>
-          <a:p>
-            <a:r>
-              <a:t>```</a:t>
-            </a:r>
-          </a:p>
-          <a:p>
-            <a:endParaRPr/>
-          </a:p>
+          <a:p/>
+          <a:p>
+            <a:r>
+              <a:t>{{vspace:1}}</a:t>
+            </a:r>
+          </a:p>
+          <a:p/>
+          <a:p>
+            <a:r>
+              <a:t>::: {.center}</a:t>
+            </a:r>
+          </a:p>
+          <a:p/>
           <a:p>
             <a:r>
               <a:t>![](figures/&lt;__BASEFILENAME__&gt;_slide&lt;__SLIDENUM__&gt;_fig.png){ width=95% }</a:t>
             </a:r>
           </a:p>
-          <a:p>
-            <a:endParaRPr lang="en-US"/>
-          </a:p>
-          <a:p>
-            <a:r>
-              <a:rPr lang="en-US"/>
+          <a:p/>
+          <a:p>
+            <a:r>
               <a:t>![](figures/&lt;__BASEFILENAME__&gt;_keyvisual.png){ width=80% }</a:t>
             </a:r>
           </a:p>
-          <a:p>
-            <a:endParaRPr lang="en-US"/>
-          </a:p>
-          <a:p>
-            <a:endParaRPr/>
-          </a:p>
-          <a:p>
-            <a:r>
-              <a:t>```{=latex}</a:t>
-            </a:r>
-          </a:p>
-          <a:p>
-            <a:r>
-              <a:t>\end{center}</a:t>
-            </a:r>
-          </a:p>
-          <a:p>
-            <a:r>
-              <a:t>\par\vspace{1\baselineskip}</a:t>
-            </a:r>
-          </a:p>
-          <a:p>
-            <a:r>
-              <a:t>```</a:t>
-            </a:r>
-          </a:p>
-          <a:p>
-            <a:endParaRPr/>
-          </a:p>
+          <a:p/>
+          <a:p/>
+          <a:p>
+            <a:r>
+              <a:t>:::</a:t>
+            </a:r>
+          </a:p>
+          <a:p/>
+          <a:p>
+            <a:r>
+              <a:t>{{vspace:1}}</a:t>
+            </a:r>
+          </a:p>
+          <a:p/>
           <a:p>
             <a:r>
               <a:t>機能としては単なる operation:insertpptx と varsであり、Chapter Cover 用ファイルを用意して中身を変数置換することで実現します。</a:t>
@@ -890,9 +836,7 @@
               <a:t>NOTE_CONTENT_FORMAT: 1.0</a:t>
             </a:r>
           </a:p>
-          <a:p>
-            <a:endParaRPr/>
-          </a:p>
+          <a:p/>
           <a:p>
             <a:r>
               <a:t>===BLOCK===</a:t>
@@ -903,9 +847,7 @@
               <a:t>{{BLOCK:IMAGE}}</a:t>
             </a:r>
           </a:p>
-          <a:p>
-            <a:endParaRPr/>
-          </a:p>
+          <a:p/>
           <a:p>
             <a:r>
               <a:t>export-image-mode: slide_with_rectpct</a:t>
@@ -921,9 +863,7 @@
               <a:t>export-image: extracted/figures/&lt;__BASEFILENAME__&gt;_slide&lt;__SLIDENUM__&gt;_fig.png</a:t>
             </a:r>
           </a:p>
-          <a:p>
-            <a:endParaRPr/>
-          </a:p>
+          <a:p/>
           <a:p>
             <a:r>
               <a:t>===BLOCK===</a:t>
@@ -934,9 +874,7 @@
               <a:t>{{BLOCK:MD:LONG}}</a:t>
             </a:r>
           </a:p>
-          <a:p>
-            <a:endParaRPr/>
-          </a:p>
+          <a:p/>
           <a:p>
             <a:r>
               <a:t>export-note: extracted/&lt;__BASEFILENAME__&gt;_slide&lt;__SLIDENUM__&gt;_md.md</a:t>
@@ -952,74 +890,46 @@
               <a:t>## &lt;__TITLE__&gt;</a:t>
             </a:r>
           </a:p>
-          <a:p>
-            <a:endParaRPr/>
-          </a:p>
+          <a:p/>
           <a:p>
             <a:r>
               <a:t>Chapter Cover 挿入運用の詳しい説明をします。</a:t>
             </a:r>
           </a:p>
-          <a:p>
-            <a:endParaRPr/>
-          </a:p>
+          <a:p/>
           <a:p>
             <a:r>
               <a:t>たとえばいずれも細かい情報の入った２つのpptxを結合したい、その際、話題が違うので Chapter 番号を変えたいとします。 operation: chapter を加えることで、Chapter 番号を変えること自体は可能ですが、この方式にはちょっとした欠点があります。</a:t>
             </a:r>
           </a:p>
-          <a:p>
-            <a:endParaRPr/>
-          </a:p>
-          <a:p>
-            <a:r>
-              <a:t>```{=latex}</a:t>
-            </a:r>
-          </a:p>
-          <a:p>
-            <a:r>
-              <a:t>\par\vspace{1\baselineskip}</a:t>
-            </a:r>
-          </a:p>
-          <a:p>
-            <a:r>
-              <a:t>\begin{center}</a:t>
-            </a:r>
-          </a:p>
-          <a:p>
-            <a:r>
-              <a:t>```</a:t>
-            </a:r>
-          </a:p>
-          <a:p>
-            <a:endParaRPr/>
-          </a:p>
+          <a:p/>
+          <a:p>
+            <a:r>
+              <a:t>{{vspace:1}}</a:t>
+            </a:r>
+          </a:p>
+          <a:p/>
+          <a:p>
+            <a:r>
+              <a:t>::: {.center}</a:t>
+            </a:r>
+          </a:p>
+          <a:p/>
           <a:p>
             <a:r>
               <a:t>![](figures/&lt;__BASEFILENAME__&gt;_slide&lt;__SLIDENUM__&gt;_fig.png){ width=95% }</a:t>
             </a:r>
           </a:p>
-          <a:p>
-            <a:endParaRPr/>
-          </a:p>
-          <a:p>
-            <a:r>
-              <a:t>```{=latex}</a:t>
-            </a:r>
-          </a:p>
-          <a:p>
-            <a:r>
-              <a:t>\end{center}</a:t>
-            </a:r>
-          </a:p>
-          <a:p>
-            <a:r>
-              <a:t>\par\vspace{1\baselineskip}</a:t>
-            </a:r>
-          </a:p>
-          <a:p>
-            <a:r>
-              <a:t>```</a:t>
+          <a:p/>
+          <a:p>
+            <a:r>
+              <a:t>:::</a:t>
+            </a:r>
+          </a:p>
+          <a:p/>
+          <a:p>
+            <a:r>
+              <a:t>{{vspace:1}}</a:t>
             </a:r>
           </a:p>
         </p:txBody>
@@ -1132,9 +1042,7 @@
               <a:t>NOTE_CONTENT_FORMAT: 1.0</a:t>
             </a:r>
           </a:p>
-          <a:p>
-            <a:endParaRPr/>
-          </a:p>
+          <a:p/>
           <a:p>
             <a:r>
               <a:t>===BLOCK===</a:t>
@@ -1145,9 +1053,7 @@
               <a:t>{{BLOCK:IMAGE}}</a:t>
             </a:r>
           </a:p>
-          <a:p>
-            <a:endParaRPr/>
-          </a:p>
+          <a:p/>
           <a:p>
             <a:r>
               <a:t>export-image-mode: slide_with_rectpct</a:t>
@@ -1163,9 +1069,7 @@
               <a:t>export-image: extracted/figures/&lt;__BASEFILENAME__&gt;_slide&lt;__SLIDENUM__&gt;_fig.png</a:t>
             </a:r>
           </a:p>
-          <a:p>
-            <a:endParaRPr/>
-          </a:p>
+          <a:p/>
           <a:p>
             <a:r>
               <a:t>===BLOCK===</a:t>
@@ -1176,9 +1080,7 @@
               <a:t>{{BLOCK:MD:LONG}}</a:t>
             </a:r>
           </a:p>
-          <a:p>
-            <a:endParaRPr/>
-          </a:p>
+          <a:p/>
           <a:p>
             <a:r>
               <a:t>export-note: extracted/&lt;__BASEFILENAME__&gt;_slide&lt;__SLIDENUM__&gt;_md.md</a:t>
@@ -1194,71 +1096,43 @@
               <a:t>## &lt;__TITLE__&gt;</a:t>
             </a:r>
           </a:p>
-          <a:p>
-            <a:endParaRPr/>
-          </a:p>
+          <a:p/>
           <a:p>
             <a:r>
               <a:t>章・節番号がついてはいても、全体として細かい情報が続いているので、読者には　「急に話題が変わった」　印象を与えやすいのです。</a:t>
             </a:r>
           </a:p>
-          <a:p>
-            <a:endParaRPr/>
-          </a:p>
-          <a:p>
-            <a:r>
-              <a:t>```{=latex}</a:t>
-            </a:r>
-          </a:p>
-          <a:p>
-            <a:r>
-              <a:t>\par\vspace{1\baselineskip}</a:t>
-            </a:r>
-          </a:p>
-          <a:p>
-            <a:r>
-              <a:t>\begin{center}</a:t>
-            </a:r>
-          </a:p>
-          <a:p>
-            <a:r>
-              <a:t>```</a:t>
-            </a:r>
-          </a:p>
-          <a:p>
-            <a:endParaRPr/>
-          </a:p>
+          <a:p/>
+          <a:p>
+            <a:r>
+              <a:t>{{vspace:1}}</a:t>
+            </a:r>
+          </a:p>
+          <a:p/>
+          <a:p>
+            <a:r>
+              <a:t>::: {.center}</a:t>
+            </a:r>
+          </a:p>
+          <a:p/>
           <a:p>
             <a:r>
               <a:t>![](figures/&lt;__BASEFILENAME__&gt;_slide&lt;__SLIDENUM__&gt;_fig.png){ width=95% }</a:t>
             </a:r>
           </a:p>
-          <a:p>
-            <a:endParaRPr/>
-          </a:p>
-          <a:p>
-            <a:r>
-              <a:t>```{=latex}</a:t>
-            </a:r>
-          </a:p>
-          <a:p>
-            <a:r>
-              <a:t>\end{center}</a:t>
-            </a:r>
-          </a:p>
-          <a:p>
-            <a:r>
-              <a:t>\par\vspace{1\baselineskip}</a:t>
-            </a:r>
-          </a:p>
-          <a:p>
-            <a:r>
-              <a:t>```</a:t>
-            </a:r>
-          </a:p>
-          <a:p>
-            <a:endParaRPr/>
-          </a:p>
+          <a:p/>
+          <a:p>
+            <a:r>
+              <a:t>:::</a:t>
+            </a:r>
+          </a:p>
+          <a:p/>
+          <a:p>
+            <a:r>
+              <a:t>{{vspace:1}}</a:t>
+            </a:r>
+          </a:p>
+          <a:p/>
           <a:p>
             <a:r>
               <a:t>はっきりとデザインの違う Chapter Cover スライドを挿入しておけば、この問題を解決できます。</a:t>
@@ -1374,9 +1248,7 @@
               <a:t>NOTE_CONTENT_FORMAT: 1.0</a:t>
             </a:r>
           </a:p>
-          <a:p>
-            <a:endParaRPr/>
-          </a:p>
+          <a:p/>
           <a:p>
             <a:r>
               <a:t>===BLOCK===</a:t>
@@ -1387,9 +1259,7 @@
               <a:t>{{BLOCK:IMAGE}}</a:t>
             </a:r>
           </a:p>
-          <a:p>
-            <a:endParaRPr/>
-          </a:p>
+          <a:p/>
           <a:p>
             <a:r>
               <a:t>export-image-mode: slide_with_rectpct</a:t>
@@ -1405,9 +1275,7 @@
               <a:t>export-image: extracted/figures/&lt;__BASEFILENAME__&gt;_slide&lt;__SLIDENUM__&gt;_fig.png</a:t>
             </a:r>
           </a:p>
-          <a:p>
-            <a:endParaRPr/>
-          </a:p>
+          <a:p/>
           <a:p>
             <a:r>
               <a:t>===BLOCK===</a:t>
@@ -1418,9 +1286,7 @@
               <a:t>{{BLOCK:MD:LONG}}</a:t>
             </a:r>
           </a:p>
-          <a:p>
-            <a:endParaRPr/>
-          </a:p>
+          <a:p/>
           <a:p>
             <a:r>
               <a:t>export-note: extracted/&lt;__BASEFILENAME__&gt;_slide&lt;__SLIDENUM__&gt;_md.md</a:t>
@@ -1436,74 +1302,46 @@
               <a:t>## &lt;__TITLE__&gt;</a:t>
             </a:r>
           </a:p>
-          <a:p>
-            <a:endParaRPr/>
-          </a:p>
+          <a:p/>
           <a:p>
             <a:r>
               <a:t>そこで、Chapter Cover 用の1枚だけのスライドを作ってoperation: chapter の代わりに operation: insertpptx で挿入します。</a:t>
             </a:r>
           </a:p>
-          <a:p>
-            <a:endParaRPr/>
-          </a:p>
+          <a:p/>
           <a:p>
             <a:r>
               <a:t>ただし、同じファイルだとChapterが分からないので、テンプレートの中身を変数で書き換えられるようにします。</a:t>
             </a:r>
           </a:p>
-          <a:p>
-            <a:endParaRPr/>
-          </a:p>
-          <a:p>
-            <a:r>
-              <a:t>```{=latex}</a:t>
-            </a:r>
-          </a:p>
-          <a:p>
-            <a:r>
-              <a:t>\par\vspace{1\baselineskip}</a:t>
-            </a:r>
-          </a:p>
-          <a:p>
-            <a:r>
-              <a:t>\begin{center}</a:t>
-            </a:r>
-          </a:p>
-          <a:p>
-            <a:r>
-              <a:t>```</a:t>
-            </a:r>
-          </a:p>
-          <a:p>
-            <a:endParaRPr/>
-          </a:p>
+          <a:p/>
+          <a:p>
+            <a:r>
+              <a:t>{{vspace:1}}</a:t>
+            </a:r>
+          </a:p>
+          <a:p/>
+          <a:p>
+            <a:r>
+              <a:t>::: {.center}</a:t>
+            </a:r>
+          </a:p>
+          <a:p/>
           <a:p>
             <a:r>
               <a:t>![](figures/&lt;__BASEFILENAME__&gt;_slide&lt;__SLIDENUM__&gt;_fig.png){ width=95% }</a:t>
             </a:r>
           </a:p>
-          <a:p>
-            <a:endParaRPr/>
-          </a:p>
-          <a:p>
-            <a:r>
-              <a:t>```{=latex}</a:t>
-            </a:r>
-          </a:p>
-          <a:p>
-            <a:r>
-              <a:t>\end{center}</a:t>
-            </a:r>
-          </a:p>
-          <a:p>
-            <a:r>
-              <a:t>\par\vspace{1\baselineskip}</a:t>
-            </a:r>
-          </a:p>
-          <a:p>
-            <a:r>
-              <a:t>```</a:t>
+          <a:p/>
+          <a:p>
+            <a:r>
+              <a:t>:::</a:t>
+            </a:r>
+          </a:p>
+          <a:p/>
+          <a:p>
+            <a:r>
+              <a:t>{{vspace:1}}</a:t>
             </a:r>
           </a:p>
         </p:txBody>
@@ -1616,9 +1454,7 @@
               <a:t>NOTE_CONTENT_FORMAT: 1.0</a:t>
             </a:r>
           </a:p>
-          <a:p>
-            <a:endParaRPr/>
-          </a:p>
+          <a:p/>
           <a:p>
             <a:r>
               <a:t>===BLOCK===</a:t>
@@ -1629,9 +1465,7 @@
               <a:t>{{BLOCK:IMAGE}}</a:t>
             </a:r>
           </a:p>
-          <a:p>
-            <a:endParaRPr/>
-          </a:p>
+          <a:p/>
           <a:p>
             <a:r>
               <a:t>export-image-mode: slide_with_rectpct</a:t>
@@ -1647,9 +1481,7 @@
               <a:t>export-image: extracted/figures/&lt;__BASEFILENAME__&gt;_slide&lt;__SLIDENUM__&gt;_fig.png</a:t>
             </a:r>
           </a:p>
-          <a:p>
-            <a:endParaRPr/>
-          </a:p>
+          <a:p/>
           <a:p>
             <a:r>
               <a:t>===BLOCK===</a:t>
@@ -1660,9 +1492,7 @@
               <a:t>{{BLOCK:MD:LONG}}</a:t>
             </a:r>
           </a:p>
-          <a:p>
-            <a:endParaRPr/>
-          </a:p>
+          <a:p/>
           <a:p>
             <a:r>
               <a:t>export-note: extracted/&lt;__BASEFILENAME__&gt;_slide&lt;__SLIDENUM__&gt;_md.md</a:t>
@@ -1678,79 +1508,49 @@
               <a:t>## &lt;__TITLE__&gt;</a:t>
             </a:r>
           </a:p>
-          <a:p>
-            <a:endParaRPr/>
-          </a:p>
+          <a:p/>
           <a:p>
             <a:r>
               <a:t>Chapter Cover テンプレートファイルの作り方です。</a:t>
             </a:r>
           </a:p>
-          <a:p>
-            <a:endParaRPr/>
-          </a:p>
+          <a:p/>
           <a:p>
             <a:r>
               <a:t>#CHAPT# マーカーを入れておくこと、TITLE プレースホルダーに置換用の変数を入れておくことがポイントです。</a:t>
             </a:r>
           </a:p>
-          <a:p>
-            <a:endParaRPr/>
-          </a:p>
-          <a:p>
-            <a:r>
-              <a:t>```{=latex}</a:t>
-            </a:r>
-          </a:p>
-          <a:p>
-            <a:r>
-              <a:t>\par\vspace{1\baselineskip}</a:t>
-            </a:r>
-          </a:p>
-          <a:p>
-            <a:r>
-              <a:t>\begin{center}</a:t>
-            </a:r>
-          </a:p>
-          <a:p>
-            <a:r>
-              <a:t>```</a:t>
-            </a:r>
-          </a:p>
-          <a:p>
-            <a:endParaRPr/>
-          </a:p>
+          <a:p/>
+          <a:p>
+            <a:r>
+              <a:t>{{vspace:1}}</a:t>
+            </a:r>
+          </a:p>
+          <a:p/>
+          <a:p>
+            <a:r>
+              <a:t>::: {.center}</a:t>
+            </a:r>
+          </a:p>
+          <a:p/>
           <a:p>
             <a:r>
               <a:t>![](figures/&lt;__BASEFILENAME__&gt;_slide&lt;__SLIDENUM__&gt;_fig.png){ width=95% }</a:t>
             </a:r>
           </a:p>
-          <a:p>
-            <a:endParaRPr/>
-          </a:p>
-          <a:p>
-            <a:r>
-              <a:t>```{=latex}</a:t>
-            </a:r>
-          </a:p>
-          <a:p>
-            <a:r>
-              <a:t>\end{center}</a:t>
-            </a:r>
-          </a:p>
-          <a:p>
-            <a:r>
-              <a:t>\par\vspace{1\baselineskip}</a:t>
-            </a:r>
-          </a:p>
-          <a:p>
-            <a:r>
-              <a:t>```</a:t>
-            </a:r>
-          </a:p>
-          <a:p>
-            <a:endParaRPr/>
-          </a:p>
+          <a:p/>
+          <a:p>
+            <a:r>
+              <a:t>:::</a:t>
+            </a:r>
+          </a:p>
+          <a:p/>
+          <a:p>
+            <a:r>
+              <a:t>{{vspace:1}}</a:t>
+            </a:r>
+          </a:p>
+          <a:p/>
           <a:p>
             <a:r>
               <a:t>概要説明文やChapter目次やも入れたければ、それも変数にしておけば置き換えられます。</a:t>
@@ -1866,9 +1666,7 @@
               <a:t>NOTE_CONTENT_FORMAT: 1.0</a:t>
             </a:r>
           </a:p>
-          <a:p>
-            <a:endParaRPr/>
-          </a:p>
+          <a:p/>
           <a:p>
             <a:r>
               <a:t>===BLOCK===</a:t>
@@ -1879,9 +1677,7 @@
               <a:t>{{BLOCK:IMAGE}}</a:t>
             </a:r>
           </a:p>
-          <a:p>
-            <a:endParaRPr/>
-          </a:p>
+          <a:p/>
           <a:p>
             <a:r>
               <a:t>export-image-mode: slide_with_rectpct</a:t>
@@ -1897,9 +1693,7 @@
               <a:t>export-image: extracted/figures/&lt;__BASEFILENAME__&gt;_slide&lt;__SLIDENUM__&gt;_fig.png</a:t>
             </a:r>
           </a:p>
-          <a:p>
-            <a:endParaRPr/>
-          </a:p>
+          <a:p/>
           <a:p>
             <a:r>
               <a:t>===BLOCK===</a:t>
@@ -1910,9 +1704,7 @@
               <a:t>{{BLOCK:MD:LONG}}</a:t>
             </a:r>
           </a:p>
-          <a:p>
-            <a:endParaRPr/>
-          </a:p>
+          <a:p/>
           <a:p>
             <a:r>
               <a:t>export-note: extracted/&lt;__BASEFILENAME__&gt;_slide&lt;__SLIDENUM__&gt;_md.md</a:t>
@@ -1928,74 +1720,46 @@
               <a:t>## &lt;__TITLE__&gt;</a:t>
             </a:r>
           </a:p>
-          <a:p>
-            <a:endParaRPr/>
-          </a:p>
+          <a:p/>
           <a:p>
             <a:r>
               <a:t>Chapter Cover のように複数の文書で共通に使いそうなファイルは共通資材用フォルダに置いて参照するのがおすすめです。</a:t>
             </a:r>
           </a:p>
-          <a:p>
-            <a:endParaRPr/>
-          </a:p>
+          <a:p/>
           <a:p>
             <a:r>
               <a:t>結合指示書上では相対パスまたは絶対パスで参照できます。</a:t>
             </a:r>
           </a:p>
-          <a:p>
-            <a:endParaRPr/>
-          </a:p>
-          <a:p>
-            <a:r>
-              <a:t>```{=latex}</a:t>
-            </a:r>
-          </a:p>
-          <a:p>
-            <a:r>
-              <a:t>\par\vspace{1\baselineskip}</a:t>
-            </a:r>
-          </a:p>
-          <a:p>
-            <a:r>
-              <a:t>\begin{center}</a:t>
-            </a:r>
-          </a:p>
-          <a:p>
-            <a:r>
-              <a:t>```</a:t>
-            </a:r>
-          </a:p>
-          <a:p>
-            <a:endParaRPr/>
-          </a:p>
+          <a:p/>
+          <a:p>
+            <a:r>
+              <a:t>{{vspace:1}}</a:t>
+            </a:r>
+          </a:p>
+          <a:p/>
+          <a:p>
+            <a:r>
+              <a:t>::: {.center}</a:t>
+            </a:r>
+          </a:p>
+          <a:p/>
           <a:p>
             <a:r>
               <a:t>![](figures/&lt;__BASEFILENAME__&gt;_slide&lt;__SLIDENUM__&gt;_fig.png){ width=95% }</a:t>
             </a:r>
           </a:p>
-          <a:p>
-            <a:endParaRPr/>
-          </a:p>
-          <a:p>
-            <a:r>
-              <a:t>```{=latex}</a:t>
-            </a:r>
-          </a:p>
-          <a:p>
-            <a:r>
-              <a:t>\end{center}</a:t>
-            </a:r>
-          </a:p>
-          <a:p>
-            <a:r>
-              <a:t>\par\vspace{1\baselineskip}</a:t>
-            </a:r>
-          </a:p>
-          <a:p>
-            <a:r>
-              <a:t>```</a:t>
+          <a:p/>
+          <a:p>
+            <a:r>
+              <a:t>:::</a:t>
+            </a:r>
+          </a:p>
+          <a:p/>
+          <a:p>
+            <a:r>
+              <a:t>{{vspace:1}}</a:t>
             </a:r>
           </a:p>
         </p:txBody>
